--- a/carousel-output/C09-3-kebiasaan-umur-panjang/C09.pptx
+++ b/carousel-output/C09-3-kebiasaan-umur-panjang/C09.pptx
@@ -4682,7 +4682,7 @@
         </p:nvSpPr>
         <p:spPr>
           <a:xfrm>
-            <a:off x="6885310" y="7177564"/>
+            <a:off x="6958087" y="7177564"/>
             <a:ext cx="2199382" cy="777240"/>
           </a:xfrm>
           <a:prstGeom prst="roundRect">
@@ -4750,7 +4750,7 @@
                 </a:solidFill>
                 <a:latin typeface="Poppins ExtraBold"/>
               </a:rPr>
-              <a:t>Umur Panjang Aktif </a:t>
+              <a:t>Umur Panjang  Aktif </a:t>
             </a:r>
           </a:p>
         </p:txBody>
